--- a/Topic_D/TD-L12_Topic_D_Review_and_Four_Skills_Assessment.pptx
+++ b/Topic_D/TD-L12_Topic_D_Review_and_Four_Skills_Assessment.pptx
@@ -715,7 +715,11 @@
           <a:lstStyle/>
           <a:p>
             <a:r>
-              <a:rPr lang="en-US" dirty="0"/>
+              <a:rPr lang="ar-SA" dirty="0">
+                <a:latin typeface="Amiri" pitchFamily="2" charset="-78"/>
+                <a:ea typeface="Amiri" pitchFamily="2" charset="-78"/>
+                <a:cs typeface="Amiri" pitchFamily="2" charset="-78"/>
+              </a:rPr>
               <a:t>LISTENING (website Part A, 20 marks: 10 questions × 2). Read the advert twice at natural pace; students answer after the second reading (website: “three listens · final details” — a third listening is allowed).
 SCRIPT: تُعْلِنُ شَرِكَةُ النُّورِ التِّقْنِيَّةُ عَنْ فُرْصَةِ تَدْرِيبٍ صَيْفِيٍّ لِلطُّلَّابِ. يُشْتَرَطُ إِجَادَةُ الحَاسُوبِ وَالقُدْرَةُ عَلَى العَمَلِ ضِمْنَ فَرِيقٍ. سَتَبْدَأُ الفُرْصَةُ فِي الثَّانِي مِنْ أَغُسْطُسَ، لَا فِي الثَّانِي عَشَرَ مِنْهُ، وَسَتَسْتَمِرُّ أَرْبَعَةَ أَسَابِيعَ. تُقَدِّمُ الشَّرِكَةُ تَدْرِيبًا وَشَهَادَةً، وَلٰكِنَّهَا لَا تُقَدِّمُ رَاتِبًا. عَلَى المُتَقَدِّمِينَ إِرْسَالُ سِيرَةٍ ذَاتِيَّةٍ قَبْلَ يَوْمِ الخَمِيسِ، وَيَنْبَغِي أَنْ يَكُونُوا مَسْؤُولِينَ وَمُسْتَعِدِّينَ لِلتَّعَلُّمِ.
 Private chat: five letters.</a:t>
@@ -893,7 +897,11 @@
           <a:lstStyle/>
           <a:p>
             <a:r>
-              <a:rPr lang="en-US" dirty="0"/>
+              <a:rPr lang="ar-SA" dirty="0">
+                <a:latin typeface="Amiri" pitchFamily="2" charset="-78"/>
+                <a:ea typeface="Amiri" pitchFamily="2" charset="-78"/>
+                <a:cs typeface="Amiri" pitchFamily="2" charset="-78"/>
+              </a:rPr>
               <a:t>LISTENING (website Part A, 20 marks: 10 questions × 2). Read the advert twice at natural pace; students answer after the second reading (website: “three listens · final details” — a third listening is allowed).
 SCRIPT: تُعْلِنُ شَرِكَةُ النُّورِ التِّقْنِيَّةُ عَنْ فُرْصَةِ تَدْرِيبٍ صَيْفِيٍّ لِلطُّلَّابِ. يُشْتَرَطُ إِجَادَةُ الحَاسُوبِ وَالقُدْرَةُ عَلَى العَمَلِ ضِمْنَ فَرِيقٍ. سَتَبْدَأُ الفُرْصَةُ فِي الثَّانِي مِنْ أَغُسْطُسَ، لَا فِي الثَّانِي عَشَرَ مِنْهُ، وَسَتَسْتَمِرُّ أَرْبَعَةَ أَسَابِيعَ. تُقَدِّمُ الشَّرِكَةُ تَدْرِيبًا وَشَهَادَةً، وَلٰكِنَّهَا لَا تُقَدِّمُ رَاتِبًا. عَلَى المُتَقَدِّمِينَ إِرْسَالُ سِيرَةٍ ذَاتِيَّةٍ قَبْلَ يَوْمِ الخَمِيسِ، وَيَنْبَغِي أَنْ يَكُونُوا مَسْؤُولِينَ وَمُسْتَعِدِّينَ لِلتَّعَلُّمِ.
 Private chat: five letters.</a:t>
@@ -1511,7 +1519,11 @@
           <a:lstStyle/>
           <a:p>
             <a:r>
-              <a:rPr lang="en-US" dirty="0"/>
+              <a:rPr lang="ar-SA" dirty="0">
+                <a:latin typeface="Amiri" pitchFamily="2" charset="-78"/>
+                <a:ea typeface="Amiri" pitchFamily="2" charset="-78"/>
+                <a:cs typeface="Amiri" pitchFamily="2" charset="-78"/>
+              </a:rPr>
               <a:t>WELCOME (1 min) — while students join.
 • Greet each student by name as they arrive: السَّلَامُ عَلَيْكُمْ. Take the register (Pastoral Tracker: attendance 0/1).
 • 2-MINUTE CHECK-IN (SEND training): a private chat to any student who seemed unsettled last lesson — “Are you okay today? 👍 / 👎”.
@@ -1780,7 +1792,11 @@
           <a:lstStyle/>
           <a:p>
             <a:r>
-              <a:rPr lang="en-US" dirty="0"/>
+              <a:rPr lang="ar-SA" dirty="0">
+                <a:latin typeface="Amiri" pitchFamily="2" charset="-78"/>
+                <a:ea typeface="Amiri" pitchFamily="2" charset="-78"/>
+                <a:cs typeface="Amiri" pitchFamily="2" charset="-78"/>
+              </a:rPr>
               <a:t>SPEAKING (website, 10 marks). Teacher questions (the TD-L11 conversation): مَا المِهْنَةُ الَّتِي تُرِيدُهَا؟ وَلِمَاذَا؟ · مَا مَهَارَاتُكَ؟ وَمَا الدَّلِيلُ؟ · مَا خُطَّتُكَ بَعْدَ المَدْرَسَةِ؟ · مَا نُقْطَةُ قُوَّتِكَ؟ · مَا الصُّعُوبَةُ المُحْتَمَلَةُ؟ وَكَيْفَ سَتَتَغَلَّبُ عَلَيْهَا؟
 To a girl: تُرِيدِينَهَا · مَهَارَاتُكِ · خُطَّتُكِ · قُوَّتِكِ · سَتَتَغَلَّبِينَ.
 Suggested marking: communication and development 4 · range 3 · accuracy and pronunciation 3. ORGANISATION: one-to-one while others finish writing, or trusted pairs with the teacher as interviewer.</a:t>
@@ -2773,7 +2789,11 @@
           <a:lstStyle/>
           <a:p>
             <a:r>
-              <a:rPr lang="en-US" dirty="0"/>
+              <a:rPr lang="ar-SA" dirty="0">
+                <a:latin typeface="Amiri" pitchFamily="2" charset="-78"/>
+                <a:ea typeface="Amiri" pitchFamily="2" charset="-78"/>
+                <a:cs typeface="Amiri" pitchFamily="2" charset="-78"/>
+              </a:rPr>
               <a:t>REVIEW (website “Cumulative grammar laboratory”, correct answers): مُهَنْدِسَةٌ · يَحْتَاجُ … إِلَى · سَأَتَدَرَّبُ · يَسُرُّنِي أَنْ أَتَقَدَّمَ لِـ · لِكَيْ أَنْجَحَ · أَنَا مُنَظَّمٌ، وَالدَّلِيلُ … · إِذَا نَجَحْتُ فَسَأَدْرُسُ … · الشَّرِكَةُ الَّتِي تُقَدِّمُ تَدْرِيبًا · مَنْ جَدَّ وَجَدَ (effort) · أُخْتِي مُحَاسِبَةٌ وَسَتَعْمَلُ فِي شَرِكَةٍ.
 The website language vault (all Topic D vocabulary by lesson) is for revision BEFORE the assessment — close it during each section.</a:t>
             </a:r>
@@ -3258,6 +3278,7 @@
                   <a:srgbClr val="D4AF37"/>
                 </a:solidFill>
                 <a:latin typeface="Amiri" pitchFamily="2" charset="-78"/>
+                <a:ea typeface="Amiri" pitchFamily="2" charset="-78"/>
                 <a:cs typeface="Amiri" pitchFamily="2" charset="-78"/>
               </a:rPr>
               <a:t>م</a:t>
@@ -3464,6 +3485,7 @@
                   <a:srgbClr val="D4AF37"/>
                 </a:solidFill>
                 <a:latin typeface="Amiri" pitchFamily="2" charset="-78"/>
+                <a:ea typeface="Amiri" pitchFamily="2" charset="-78"/>
                 <a:cs typeface="Amiri" pitchFamily="2" charset="-78"/>
               </a:rPr>
               <a:t>مُرَاجَعَةُ المِحْوَرِ د وَتَقْيِيمُ المَهَارَاتِ الأَرْبَعِ</a:t>
@@ -3921,6 +3943,7 @@
                   <a:srgbClr val="D4AF37"/>
                 </a:solidFill>
                 <a:latin typeface="Amiri" pitchFamily="2" charset="-78"/>
+                <a:ea typeface="Amiri" pitchFamily="2" charset="-78"/>
                 <a:cs typeface="Amiri" pitchFamily="2" charset="-78"/>
               </a:rPr>
               <a:t>م</a:t>
@@ -4241,6 +4264,7 @@
                   <a:srgbClr val="8A6D1E"/>
                 </a:solidFill>
                 <a:latin typeface="Amiri" pitchFamily="2" charset="-78"/>
+                <a:ea typeface="Amiri" pitchFamily="2" charset="-78"/>
                 <a:cs typeface="Amiri" pitchFamily="2" charset="-78"/>
               </a:rPr>
               <a:t>خُطَّةُ التَّقْيِيمِ</a:t>
@@ -5375,6 +5399,7 @@
                   <a:srgbClr val="D4AF37"/>
                 </a:solidFill>
                 <a:latin typeface="Amiri" pitchFamily="2" charset="-78"/>
+                <a:ea typeface="Amiri" pitchFamily="2" charset="-78"/>
                 <a:cs typeface="Amiri" pitchFamily="2" charset="-78"/>
               </a:rPr>
               <a:t>م</a:t>
@@ -5695,6 +5720,7 @@
                   <a:srgbClr val="8A6D1E"/>
                 </a:solidFill>
                 <a:latin typeface="Amiri" pitchFamily="2" charset="-78"/>
+                <a:ea typeface="Amiri" pitchFamily="2" charset="-78"/>
                 <a:cs typeface="Amiri" pitchFamily="2" charset="-78"/>
               </a:rPr>
               <a:t>الاِسْتِمَاعُ</a:t>
@@ -8056,6 +8082,7 @@
                   <a:srgbClr val="D4AF37"/>
                 </a:solidFill>
                 <a:latin typeface="Amiri" pitchFamily="2" charset="-78"/>
+                <a:ea typeface="Amiri" pitchFamily="2" charset="-78"/>
                 <a:cs typeface="Amiri" pitchFamily="2" charset="-78"/>
               </a:rPr>
               <a:t>م</a:t>
@@ -8376,6 +8403,7 @@
                   <a:srgbClr val="8A6D1E"/>
                 </a:solidFill>
                 <a:latin typeface="Amiri" pitchFamily="2" charset="-78"/>
+                <a:ea typeface="Amiri" pitchFamily="2" charset="-78"/>
                 <a:cs typeface="Amiri" pitchFamily="2" charset="-78"/>
               </a:rPr>
               <a:t>الإِجَابَاتُ</a:t>
@@ -8917,6 +8945,7 @@
                   <a:srgbClr val="8A6D1E"/>
                 </a:solidFill>
                 <a:latin typeface="Amiri" pitchFamily="2" charset="-78"/>
+                <a:ea typeface="Amiri" pitchFamily="2" charset="-78"/>
                 <a:cs typeface="Amiri" pitchFamily="2" charset="-78"/>
               </a:rPr>
               <a:t>فُرْصَةِ تَدْرِيبٍ صَيْفِيٍّ</a:t>
@@ -9420,6 +9449,7 @@
                   <a:srgbClr val="8A6D1E"/>
                 </a:solidFill>
                 <a:latin typeface="Amiri" pitchFamily="2" charset="-78"/>
+                <a:ea typeface="Amiri" pitchFamily="2" charset="-78"/>
                 <a:cs typeface="Amiri" pitchFamily="2" charset="-78"/>
               </a:rPr>
               <a:t>العَمَلِ ضِمْنَ فَرِيقٍ</a:t>
@@ -9923,6 +9953,7 @@
                   <a:srgbClr val="8A6D1E"/>
                 </a:solidFill>
                 <a:latin typeface="Amiri" pitchFamily="2" charset="-78"/>
+                <a:ea typeface="Amiri" pitchFamily="2" charset="-78"/>
                 <a:cs typeface="Amiri" pitchFamily="2" charset="-78"/>
               </a:rPr>
               <a:t>فِي الثَّانِي مِنْ أَغُسْطُسَ، لَا فِي الثَّانِي عَشَرَ</a:t>
@@ -10426,6 +10457,7 @@
                   <a:srgbClr val="8A6D1E"/>
                 </a:solidFill>
                 <a:latin typeface="Amiri" pitchFamily="2" charset="-78"/>
+                <a:ea typeface="Amiri" pitchFamily="2" charset="-78"/>
                 <a:cs typeface="Amiri" pitchFamily="2" charset="-78"/>
               </a:rPr>
               <a:t>أَرْبَعَةَ أَسَابِيعَ</a:t>
@@ -10929,6 +10961,7 @@
                   <a:srgbClr val="8A6D1E"/>
                 </a:solidFill>
                 <a:latin typeface="Amiri" pitchFamily="2" charset="-78"/>
+                <a:ea typeface="Amiri" pitchFamily="2" charset="-78"/>
                 <a:cs typeface="Amiri" pitchFamily="2" charset="-78"/>
               </a:rPr>
               <a:t>تَدْرِيبًا وَشَهَادَةً</a:t>
@@ -11062,6 +11095,7 @@
                   <a:srgbClr val="D4AF37"/>
                 </a:solidFill>
                 <a:latin typeface="Amiri" pitchFamily="2" charset="-78"/>
+                <a:ea typeface="Amiri" pitchFamily="2" charset="-78"/>
                 <a:cs typeface="Amiri" pitchFamily="2" charset="-78"/>
               </a:rPr>
               <a:t>م</a:t>
@@ -11382,6 +11416,7 @@
                   <a:srgbClr val="8A6D1E"/>
                 </a:solidFill>
                 <a:latin typeface="Amiri" pitchFamily="2" charset="-78"/>
+                <a:ea typeface="Amiri" pitchFamily="2" charset="-78"/>
                 <a:cs typeface="Amiri" pitchFamily="2" charset="-78"/>
               </a:rPr>
               <a:t>الاِسْتِمَاعُ</a:t>
@@ -13743,6 +13778,7 @@
                   <a:srgbClr val="D4AF37"/>
                 </a:solidFill>
                 <a:latin typeface="Amiri" pitchFamily="2" charset="-78"/>
+                <a:ea typeface="Amiri" pitchFamily="2" charset="-78"/>
                 <a:cs typeface="Amiri" pitchFamily="2" charset="-78"/>
               </a:rPr>
               <a:t>م</a:t>
@@ -14063,6 +14099,7 @@
                   <a:srgbClr val="8A6D1E"/>
                 </a:solidFill>
                 <a:latin typeface="Amiri" pitchFamily="2" charset="-78"/>
+                <a:ea typeface="Amiri" pitchFamily="2" charset="-78"/>
                 <a:cs typeface="Amiri" pitchFamily="2" charset="-78"/>
               </a:rPr>
               <a:t>الإِجَابَاتُ</a:t>
@@ -14604,6 +14641,7 @@
                   <a:srgbClr val="8A6D1E"/>
                 </a:solidFill>
                 <a:latin typeface="Amiri" pitchFamily="2" charset="-78"/>
+                <a:ea typeface="Amiri" pitchFamily="2" charset="-78"/>
                 <a:cs typeface="Amiri" pitchFamily="2" charset="-78"/>
               </a:rPr>
               <a:t>لَا تُقَدِّمُ رَاتِبًا</a:t>
@@ -15107,6 +15145,7 @@
                   <a:srgbClr val="8A6D1E"/>
                 </a:solidFill>
                 <a:latin typeface="Amiri" pitchFamily="2" charset="-78"/>
+                <a:ea typeface="Amiri" pitchFamily="2" charset="-78"/>
                 <a:cs typeface="Amiri" pitchFamily="2" charset="-78"/>
               </a:rPr>
               <a:t>إِرْسَالُ سِيرَةٍ ذَاتِيَّةٍ</a:t>
@@ -15610,6 +15649,7 @@
                   <a:srgbClr val="8A6D1E"/>
                 </a:solidFill>
                 <a:latin typeface="Amiri" pitchFamily="2" charset="-78"/>
+                <a:ea typeface="Amiri" pitchFamily="2" charset="-78"/>
                 <a:cs typeface="Amiri" pitchFamily="2" charset="-78"/>
               </a:rPr>
               <a:t>قَبْلَ يَوْمِ الخَمِيسِ</a:t>
@@ -16113,6 +16153,7 @@
                   <a:srgbClr val="8A6D1E"/>
                 </a:solidFill>
                 <a:latin typeface="Amiri" pitchFamily="2" charset="-78"/>
+                <a:ea typeface="Amiri" pitchFamily="2" charset="-78"/>
                 <a:cs typeface="Amiri" pitchFamily="2" charset="-78"/>
               </a:rPr>
               <a:t>مَسْؤُولِينَ وَمُسْتَعِدِّينَ لِلتَّعَلُّمِ</a:t>
@@ -16616,6 +16657,7 @@
                   <a:srgbClr val="8A6D1E"/>
                 </a:solidFill>
                 <a:latin typeface="Amiri" pitchFamily="2" charset="-78"/>
+                <a:ea typeface="Amiri" pitchFamily="2" charset="-78"/>
                 <a:cs typeface="Amiri" pitchFamily="2" charset="-78"/>
               </a:rPr>
               <a:t>تُعْلِنُ … عَنْ فُرْصَةِ تَدْرِيبٍ</a:t>
@@ -16749,6 +16791,7 @@
                   <a:srgbClr val="D4AF37"/>
                 </a:solidFill>
                 <a:latin typeface="Amiri" pitchFamily="2" charset="-78"/>
+                <a:ea typeface="Amiri" pitchFamily="2" charset="-78"/>
                 <a:cs typeface="Amiri" pitchFamily="2" charset="-78"/>
               </a:rPr>
               <a:t>م</a:t>
@@ -17069,6 +17112,7 @@
                   <a:srgbClr val="8A6D1E"/>
                 </a:solidFill>
                 <a:latin typeface="Amiri" pitchFamily="2" charset="-78"/>
+                <a:ea typeface="Amiri" pitchFamily="2" charset="-78"/>
                 <a:cs typeface="Amiri" pitchFamily="2" charset="-78"/>
               </a:rPr>
               <a:t>خُطَّتِي المِهَنِيَّةُ</a:t>
@@ -17182,6 +17226,7 @@
                   <a:srgbClr val="1F2A37"/>
                 </a:solidFill>
                 <a:latin typeface="Amiri" pitchFamily="2" charset="-78"/>
+                <a:ea typeface="Amiri" pitchFamily="2" charset="-78"/>
                 <a:cs typeface="Amiri" pitchFamily="2" charset="-78"/>
               </a:rPr>
               <a:t>أَطْمَحُ إِلَى أَنْ أُصْبِحَ مُهَنْدِسَةَ بِيئَةٍ لِأَنَّنِي أُرِيدُ أَنْ أُسَاهِمَ فِي حَلِّ مُشْكِلَاتِ التَّلَوُّثِ. أَنَا جَيِّدَةٌ فِي العُلُومِ وَالعَمَلِ الجَمَاعِيِّ، وَالدَّلِيلُ عَلَى ذٰلِكَ أَنَّنِي قُدْتُ مَشْرُوعًا مَدْرَسِيًّا عَنْ إِعَادَةِ التَّدْوِيرِ. بَعْدَ التَّخَرُّجِ سَأَدْرُسُ الهَنْدَسَةَ، ثُمَّ سَأَبْحَثُ عَنْ تَدْرِيبٍ عَمَلِيٍّ. عَلَى الرَّغْمِ مِنْ أَنَّ الطَّرِيقَ طَوِيلٌ، فَإِنَّنِي مُسْتَعِدَّةٌ لِلْعَمَلِ بِجِدٍّ.</a:t>
@@ -17315,6 +17360,7 @@
                   <a:srgbClr val="D4AF37"/>
                 </a:solidFill>
                 <a:latin typeface="Amiri" pitchFamily="2" charset="-78"/>
+                <a:ea typeface="Amiri" pitchFamily="2" charset="-78"/>
                 <a:cs typeface="Amiri" pitchFamily="2" charset="-78"/>
               </a:rPr>
               <a:t>م</a:t>
@@ -17635,6 +17681,7 @@
                   <a:srgbClr val="8A6D1E"/>
                 </a:solidFill>
                 <a:latin typeface="Amiri" pitchFamily="2" charset="-78"/>
+                <a:ea typeface="Amiri" pitchFamily="2" charset="-78"/>
                 <a:cs typeface="Amiri" pitchFamily="2" charset="-78"/>
               </a:rPr>
               <a:t>أَسْئِلَةُ القِرَاءَةِ</a:t>
@@ -19996,6 +20043,7 @@
                   <a:srgbClr val="D4AF37"/>
                 </a:solidFill>
                 <a:latin typeface="Amiri" pitchFamily="2" charset="-78"/>
+                <a:ea typeface="Amiri" pitchFamily="2" charset="-78"/>
                 <a:cs typeface="Amiri" pitchFamily="2" charset="-78"/>
               </a:rPr>
               <a:t>م</a:t>
@@ -20316,6 +20364,7 @@
                   <a:srgbClr val="8A6D1E"/>
                 </a:solidFill>
                 <a:latin typeface="Amiri" pitchFamily="2" charset="-78"/>
+                <a:ea typeface="Amiri" pitchFamily="2" charset="-78"/>
                 <a:cs typeface="Amiri" pitchFamily="2" charset="-78"/>
               </a:rPr>
               <a:t>الإِجَابَاتُ</a:t>
@@ -20857,6 +20906,7 @@
                   <a:srgbClr val="8A6D1E"/>
                 </a:solidFill>
                 <a:latin typeface="Amiri" pitchFamily="2" charset="-78"/>
+                <a:ea typeface="Amiri" pitchFamily="2" charset="-78"/>
                 <a:cs typeface="Amiri" pitchFamily="2" charset="-78"/>
               </a:rPr>
               <a:t>مُهَنْدِسَةَ بِيئَةٍ</a:t>
@@ -21360,6 +21410,7 @@
                   <a:srgbClr val="8A6D1E"/>
                 </a:solidFill>
                 <a:latin typeface="Amiri" pitchFamily="2" charset="-78"/>
+                <a:ea typeface="Amiri" pitchFamily="2" charset="-78"/>
                 <a:cs typeface="Amiri" pitchFamily="2" charset="-78"/>
               </a:rPr>
               <a:t>حَلِّ مُشْكِلَاتِ التَّلَوُّثِ</a:t>
@@ -21863,6 +21914,7 @@
                   <a:srgbClr val="8A6D1E"/>
                 </a:solidFill>
                 <a:latin typeface="Amiri" pitchFamily="2" charset="-78"/>
+                <a:ea typeface="Amiri" pitchFamily="2" charset="-78"/>
                 <a:cs typeface="Amiri" pitchFamily="2" charset="-78"/>
               </a:rPr>
               <a:t>العُلُومِ وَالعَمَلِ الجَمَاعِيِّ</a:t>
@@ -22366,6 +22418,7 @@
                   <a:srgbClr val="8A6D1E"/>
                 </a:solidFill>
                 <a:latin typeface="Amiri" pitchFamily="2" charset="-78"/>
+                <a:ea typeface="Amiri" pitchFamily="2" charset="-78"/>
                 <a:cs typeface="Amiri" pitchFamily="2" charset="-78"/>
               </a:rPr>
               <a:t>قُدْتُ مَشْرُوعًا … إِعَادَةِ التَّدْوِيرِ</a:t>
@@ -22869,6 +22922,7 @@
                   <a:srgbClr val="8A6D1E"/>
                 </a:solidFill>
                 <a:latin typeface="Amiri" pitchFamily="2" charset="-78"/>
+                <a:ea typeface="Amiri" pitchFamily="2" charset="-78"/>
                 <a:cs typeface="Amiri" pitchFamily="2" charset="-78"/>
               </a:rPr>
               <a:t>سَأَدْرُسُ الهَنْدَسَةَ</a:t>
@@ -23002,6 +23056,7 @@
                   <a:srgbClr val="D4AF37"/>
                 </a:solidFill>
                 <a:latin typeface="Amiri" pitchFamily="2" charset="-78"/>
+                <a:ea typeface="Amiri" pitchFamily="2" charset="-78"/>
                 <a:cs typeface="Amiri" pitchFamily="2" charset="-78"/>
               </a:rPr>
               <a:t>م</a:t>
@@ -23322,6 +23377,7 @@
                   <a:srgbClr val="8A6D1E"/>
                 </a:solidFill>
                 <a:latin typeface="Amiri" pitchFamily="2" charset="-78"/>
+                <a:ea typeface="Amiri" pitchFamily="2" charset="-78"/>
                 <a:cs typeface="Amiri" pitchFamily="2" charset="-78"/>
               </a:rPr>
               <a:t>أَسْئِلَةُ القِرَاءَةِ</a:t>
@@ -24910,6 +24966,7 @@
                   <a:srgbClr val="1F2A37"/>
                 </a:solidFill>
                 <a:latin typeface="Amiri" pitchFamily="2" charset="-78"/>
+                <a:ea typeface="Amiri" pitchFamily="2" charset="-78"/>
                 <a:cs typeface="Amiri" pitchFamily="2" charset="-78"/>
               </a:rPr>
               <a:t>عَلَى الرَّغْمِ مِنْ أَنَّ</a:t>
@@ -25011,6 +25068,7 @@
                   <a:srgbClr val="1F2A37"/>
                 </a:solidFill>
                 <a:latin typeface="Amiri" pitchFamily="2" charset="-78"/>
+                <a:ea typeface="Amiri" pitchFamily="2" charset="-78"/>
                 <a:cs typeface="Amiri" pitchFamily="2" charset="-78"/>
               </a:rPr>
               <a:t>ثُمَّ</a:t>
@@ -25112,6 +25170,7 @@
                   <a:srgbClr val="1F2A37"/>
                 </a:solidFill>
                 <a:latin typeface="Amiri" pitchFamily="2" charset="-78"/>
+                <a:ea typeface="Amiri" pitchFamily="2" charset="-78"/>
                 <a:cs typeface="Amiri" pitchFamily="2" charset="-78"/>
               </a:rPr>
               <a:t>لِكَيْ</a:t>
@@ -25683,6 +25742,7 @@
                   <a:srgbClr val="D4AF37"/>
                 </a:solidFill>
                 <a:latin typeface="Amiri" pitchFamily="2" charset="-78"/>
+                <a:ea typeface="Amiri" pitchFamily="2" charset="-78"/>
                 <a:cs typeface="Amiri" pitchFamily="2" charset="-78"/>
               </a:rPr>
               <a:t>م</a:t>
@@ -26003,6 +26063,7 @@
                   <a:srgbClr val="8A6D1E"/>
                 </a:solidFill>
                 <a:latin typeface="Amiri" pitchFamily="2" charset="-78"/>
+                <a:ea typeface="Amiri" pitchFamily="2" charset="-78"/>
                 <a:cs typeface="Amiri" pitchFamily="2" charset="-78"/>
               </a:rPr>
               <a:t>الإِجَابَاتُ</a:t>
@@ -26544,6 +26605,7 @@
                   <a:srgbClr val="8A6D1E"/>
                 </a:solidFill>
                 <a:latin typeface="Amiri" pitchFamily="2" charset="-78"/>
+                <a:ea typeface="Amiri" pitchFamily="2" charset="-78"/>
                 <a:cs typeface="Amiri" pitchFamily="2" charset="-78"/>
               </a:rPr>
               <a:t>تَدْرِيبٍ عَمَلِيٍّ</a:t>
@@ -27047,6 +27109,7 @@
                   <a:srgbClr val="8A6D1E"/>
                 </a:solidFill>
                 <a:latin typeface="Amiri" pitchFamily="2" charset="-78"/>
+                <a:ea typeface="Amiri" pitchFamily="2" charset="-78"/>
                 <a:cs typeface="Amiri" pitchFamily="2" charset="-78"/>
               </a:rPr>
               <a:t>الطَّرِيقَ طَوِيلٌ</a:t>
@@ -27550,6 +27613,7 @@
                   <a:srgbClr val="8A6D1E"/>
                 </a:solidFill>
                 <a:latin typeface="Amiri" pitchFamily="2" charset="-78"/>
+                <a:ea typeface="Amiri" pitchFamily="2" charset="-78"/>
                 <a:cs typeface="Amiri" pitchFamily="2" charset="-78"/>
               </a:rPr>
               <a:t>مُسْتَعِدَّةٌ لِلْعَمَلِ بِجِدٍّ</a:t>
@@ -27813,6 +27877,7 @@
                   <a:srgbClr val="1F2A37"/>
                 </a:solidFill>
                 <a:latin typeface="Amiri" pitchFamily="2" charset="-78"/>
+                <a:ea typeface="Amiri" pitchFamily="2" charset="-78"/>
                 <a:cs typeface="Amiri" pitchFamily="2" charset="-78"/>
               </a:rPr>
               <a:t>عَلَى الرَّغْمِ مِنْ أَنَّ</a:t>
@@ -27914,6 +27979,7 @@
                   <a:srgbClr val="9AA1AB"/>
                 </a:solidFill>
                 <a:latin typeface="Amiri" pitchFamily="2" charset="-78"/>
+                <a:ea typeface="Amiri" pitchFamily="2" charset="-78"/>
                 <a:cs typeface="Amiri" pitchFamily="2" charset="-78"/>
               </a:rPr>
               <a:t>ثُمَّ</a:t>
@@ -28015,6 +28081,7 @@
                   <a:srgbClr val="9AA1AB"/>
                 </a:solidFill>
                 <a:latin typeface="Amiri" pitchFamily="2" charset="-78"/>
+                <a:ea typeface="Amiri" pitchFamily="2" charset="-78"/>
                 <a:cs typeface="Amiri" pitchFamily="2" charset="-78"/>
               </a:rPr>
               <a:t>لِكَيْ</a:t>
@@ -28556,6 +28623,7 @@
                   <a:srgbClr val="8A6D1E"/>
                 </a:solidFill>
                 <a:latin typeface="Amiri" pitchFamily="2" charset="-78"/>
+                <a:ea typeface="Amiri" pitchFamily="2" charset="-78"/>
                 <a:cs typeface="Amiri" pitchFamily="2" charset="-78"/>
               </a:rPr>
               <a:t>أَطْمَحُ … سَأَدْرُسُ …</a:t>
@@ -28689,6 +28757,7 @@
                   <a:srgbClr val="D4AF37"/>
                 </a:solidFill>
                 <a:latin typeface="Amiri" pitchFamily="2" charset="-78"/>
+                <a:ea typeface="Amiri" pitchFamily="2" charset="-78"/>
                 <a:cs typeface="Amiri" pitchFamily="2" charset="-78"/>
               </a:rPr>
               <a:t>م</a:t>
@@ -29009,6 +29078,7 @@
                   <a:srgbClr val="8A6D1E"/>
                 </a:solidFill>
                 <a:latin typeface="Amiri" pitchFamily="2" charset="-78"/>
+                <a:ea typeface="Amiri" pitchFamily="2" charset="-78"/>
                 <a:cs typeface="Amiri" pitchFamily="2" charset="-78"/>
               </a:rPr>
               <a:t>آدَابُ الصَّفِّ</a:t>
@@ -30540,6 +30610,7 @@
                   <a:srgbClr val="D4AF37"/>
                 </a:solidFill>
                 <a:latin typeface="Amiri" pitchFamily="2" charset="-78"/>
+                <a:ea typeface="Amiri" pitchFamily="2" charset="-78"/>
                 <a:cs typeface="Amiri" pitchFamily="2" charset="-78"/>
               </a:rPr>
               <a:t>م</a:t>
@@ -30860,6 +30931,7 @@
                   <a:srgbClr val="8A6D1E"/>
                 </a:solidFill>
                 <a:latin typeface="Amiri" pitchFamily="2" charset="-78"/>
+                <a:ea typeface="Amiri" pitchFamily="2" charset="-78"/>
                 <a:cs typeface="Amiri" pitchFamily="2" charset="-78"/>
               </a:rPr>
               <a:t>مِلَفُّ الطَّلَبِ</a:t>
@@ -31140,6 +31212,7 @@
                   <a:srgbClr val="1B3B6F"/>
                 </a:solidFill>
                 <a:latin typeface="Amiri" pitchFamily="2" charset="-78"/>
+                <a:ea typeface="Amiri" pitchFamily="2" charset="-78"/>
                 <a:cs typeface="Amiri" pitchFamily="2" charset="-78"/>
               </a:rPr>
               <a:t>الوَظِيفَةُ المُخْتَارَةُ</a:t>
@@ -31346,6 +31419,7 @@
                   <a:srgbClr val="1B3B6F"/>
                 </a:solidFill>
                 <a:latin typeface="Amiri" pitchFamily="2" charset="-78"/>
+                <a:ea typeface="Amiri" pitchFamily="2" charset="-78"/>
                 <a:cs typeface="Amiri" pitchFamily="2" charset="-78"/>
               </a:rPr>
               <a:t>مَهَارَتَانِ</a:t>
@@ -31552,6 +31626,7 @@
                   <a:srgbClr val="1B3B6F"/>
                 </a:solidFill>
                 <a:latin typeface="Amiri" pitchFamily="2" charset="-78"/>
+                <a:ea typeface="Amiri" pitchFamily="2" charset="-78"/>
                 <a:cs typeface="Amiri" pitchFamily="2" charset="-78"/>
               </a:rPr>
               <a:t>دَلِيلٌ عَلَى مَهَارَةٍ</a:t>
@@ -31758,6 +31833,7 @@
                   <a:srgbClr val="1B3B6F"/>
                 </a:solidFill>
                 <a:latin typeface="Amiri" pitchFamily="2" charset="-78"/>
+                <a:ea typeface="Amiri" pitchFamily="2" charset="-78"/>
                 <a:cs typeface="Amiri" pitchFamily="2" charset="-78"/>
               </a:rPr>
               <a:t>خِبْرَةٌ سَابِقَةٌ</a:t>
@@ -31964,6 +32040,7 @@
                   <a:srgbClr val="1B3B6F"/>
                 </a:solidFill>
                 <a:latin typeface="Amiri" pitchFamily="2" charset="-78"/>
+                <a:ea typeface="Amiri" pitchFamily="2" charset="-78"/>
                 <a:cs typeface="Amiri" pitchFamily="2" charset="-78"/>
               </a:rPr>
               <a:t>خُطَّةٌ مُسْتَقْبَلِيَّةٌ</a:t>
@@ -32118,6 +32195,7 @@
                   <a:srgbClr val="1B3B6F"/>
                 </a:solidFill>
                 <a:latin typeface="Amiri" pitchFamily="2" charset="-78"/>
+                <a:ea typeface="Amiri" pitchFamily="2" charset="-78"/>
                 <a:cs typeface="Amiri" pitchFamily="2" charset="-78"/>
               </a:rPr>
               <a:t>مُبَرْمِجٌ</a:t>
@@ -32144,6 +32222,7 @@
                   <a:srgbClr val="1B3B6F"/>
                 </a:solidFill>
                 <a:latin typeface="Amiri" pitchFamily="2" charset="-78"/>
+                <a:ea typeface="Amiri" pitchFamily="2" charset="-78"/>
                 <a:cs typeface="Amiri" pitchFamily="2" charset="-78"/>
               </a:rPr>
               <a:t>حَلُّ المُشْكِلَاتِ وَالعَمَلُ الجَمَاعِيُّ</a:t>
@@ -32170,6 +32249,7 @@
                   <a:srgbClr val="1B3B6F"/>
                 </a:solidFill>
                 <a:latin typeface="Amiri" pitchFamily="2" charset="-78"/>
+                <a:ea typeface="Amiri" pitchFamily="2" charset="-78"/>
                 <a:cs typeface="Amiri" pitchFamily="2" charset="-78"/>
               </a:rPr>
               <a:t>قُدْتُ فَرِيقًا فِي مَشْرُوعٍ</a:t>
@@ -32196,6 +32276,7 @@
                   <a:srgbClr val="1B3B6F"/>
                 </a:solidFill>
                 <a:latin typeface="Amiri" pitchFamily="2" charset="-78"/>
+                <a:ea typeface="Amiri" pitchFamily="2" charset="-78"/>
                 <a:cs typeface="Amiri" pitchFamily="2" charset="-78"/>
               </a:rPr>
               <a:t>تَطَوَّعْتُ فِي المَكْتَبَةِ</a:t>
@@ -32222,6 +32303,7 @@
                   <a:srgbClr val="1B3B6F"/>
                 </a:solidFill>
                 <a:latin typeface="Amiri" pitchFamily="2" charset="-78"/>
+                <a:ea typeface="Amiri" pitchFamily="2" charset="-78"/>
                 <a:cs typeface="Amiri" pitchFamily="2" charset="-78"/>
               </a:rPr>
               <a:t>سَأَدْرُسُ عُلُومَ الحَاسُوبِ</a:t>
@@ -32355,6 +32437,7 @@
                   <a:srgbClr val="D4AF37"/>
                 </a:solidFill>
                 <a:latin typeface="Amiri" pitchFamily="2" charset="-78"/>
+                <a:ea typeface="Amiri" pitchFamily="2" charset="-78"/>
                 <a:cs typeface="Amiri" pitchFamily="2" charset="-78"/>
               </a:rPr>
               <a:t>م</a:t>
@@ -32675,6 +32758,7 @@
                   <a:srgbClr val="8A6D1E"/>
                 </a:solidFill>
                 <a:latin typeface="Amiri" pitchFamily="2" charset="-78"/>
+                <a:ea typeface="Amiri" pitchFamily="2" charset="-78"/>
                 <a:cs typeface="Amiri" pitchFamily="2" charset="-78"/>
               </a:rPr>
               <a:t>مَقَالٌ أَوْ رِسَالَةٌ رَسْمِيَّةٌ</a:t>
@@ -33825,6 +33909,7 @@
                   <a:srgbClr val="D4AF37"/>
                 </a:solidFill>
                 <a:latin typeface="Amiri" pitchFamily="2" charset="-78"/>
+                <a:ea typeface="Amiri" pitchFamily="2" charset="-78"/>
                 <a:cs typeface="Amiri" pitchFamily="2" charset="-78"/>
               </a:rPr>
               <a:t>م</a:t>
@@ -34145,6 +34230,7 @@
                   <a:srgbClr val="8A6D1E"/>
                 </a:solidFill>
                 <a:latin typeface="Amiri" pitchFamily="2" charset="-78"/>
+                <a:ea typeface="Amiri" pitchFamily="2" charset="-78"/>
                 <a:cs typeface="Amiri" pitchFamily="2" charset="-78"/>
               </a:rPr>
               <a:t>التَّحَدُّثُ</a:t>
@@ -35295,6 +35381,7 @@
                   <a:srgbClr val="D4AF37"/>
                 </a:solidFill>
                 <a:latin typeface="Amiri" pitchFamily="2" charset="-78"/>
+                <a:ea typeface="Amiri" pitchFamily="2" charset="-78"/>
                 <a:cs typeface="Amiri" pitchFamily="2" charset="-78"/>
               </a:rPr>
               <a:t>م</a:t>
@@ -35615,6 +35702,7 @@
                   <a:srgbClr val="8A6D1E"/>
                 </a:solidFill>
                 <a:latin typeface="Amiri" pitchFamily="2" charset="-78"/>
+                <a:ea typeface="Amiri" pitchFamily="2" charset="-78"/>
                 <a:cs typeface="Amiri" pitchFamily="2" charset="-78"/>
               </a:rPr>
               <a:t>مِلَفُّ المَهَارَاتِ</a:t>
@@ -36787,6 +36875,7 @@
                   <a:srgbClr val="D4AF37"/>
                 </a:solidFill>
                 <a:latin typeface="Amiri" pitchFamily="2" charset="-78"/>
+                <a:ea typeface="Amiri" pitchFamily="2" charset="-78"/>
                 <a:cs typeface="Amiri" pitchFamily="2" charset="-78"/>
               </a:rPr>
               <a:t>م</a:t>
@@ -37107,6 +37196,7 @@
                   <a:srgbClr val="8A6D1E"/>
                 </a:solidFill>
                 <a:latin typeface="Amiri" pitchFamily="2" charset="-78"/>
+                <a:ea typeface="Amiri" pitchFamily="2" charset="-78"/>
                 <a:cs typeface="Amiri" pitchFamily="2" charset="-78"/>
               </a:rPr>
               <a:t>قَيِّمْ عَمَلَكَ</a:t>
@@ -38264,6 +38354,7 @@
                   <a:srgbClr val="D4AF37"/>
                 </a:solidFill>
                 <a:latin typeface="Amiri" pitchFamily="2" charset="-78"/>
+                <a:ea typeface="Amiri" pitchFamily="2" charset="-78"/>
                 <a:cs typeface="Amiri" pitchFamily="2" charset="-78"/>
               </a:rPr>
               <a:t>م</a:t>
@@ -38584,6 +38675,7 @@
                   <a:srgbClr val="8A6D1E"/>
                 </a:solidFill>
                 <a:latin typeface="Amiri" pitchFamily="2" charset="-78"/>
+                <a:ea typeface="Amiri" pitchFamily="2" charset="-78"/>
                 <a:cs typeface="Amiri" pitchFamily="2" charset="-78"/>
               </a:rPr>
               <a:t>التَّحْضِيرُ لِلدَّرْسِ القَادِمِ</a:t>
@@ -38797,6 +38889,7 @@
                   <a:srgbClr val="1B3B6F"/>
                 </a:solidFill>
                 <a:latin typeface="Amiri" pitchFamily="2" charset="-78"/>
+                <a:ea typeface="Amiri" pitchFamily="2" charset="-78"/>
                 <a:cs typeface="Amiri" pitchFamily="2" charset="-78"/>
               </a:rPr>
               <a:t>دَوْلَةٌ</a:t>
@@ -38843,11 +38936,12 @@
               <a:buNone/>
             </a:pPr>
             <a:r>
-              <a:rPr lang="en-US" sz="1000" i="1" dirty="0">
+              <a:rPr lang="ar-SA" sz="1000" i="1" dirty="0">
                 <a:solidFill>
                   <a:srgbClr val="5A6472"/>
                 </a:solidFill>
                 <a:latin typeface="Calibri" pitchFamily="34" charset="0"/>
+                <a:ea typeface="Amiri" pitchFamily="2" charset="-78"/>
                 <a:cs typeface="Amiri" pitchFamily="2" charset="-78"/>
               </a:rPr>
               <a:t>  pl. دُوَلٌ</a:t>
@@ -38886,6 +38980,7 @@
                   <a:srgbClr val="1B3B6F"/>
                 </a:solidFill>
                 <a:latin typeface="Amiri" pitchFamily="2" charset="-78"/>
+                <a:ea typeface="Amiri" pitchFamily="2" charset="-78"/>
                 <a:cs typeface="Amiri" pitchFamily="2" charset="-78"/>
               </a:rPr>
               <a:t>جِنْسِيَّةٌ</a:t>
@@ -38932,11 +39027,12 @@
               <a:buNone/>
             </a:pPr>
             <a:r>
-              <a:rPr lang="en-US" sz="1000" i="1" dirty="0">
+              <a:rPr lang="ar-SA" sz="1000" i="1" dirty="0">
                 <a:solidFill>
                   <a:srgbClr val="5A6472"/>
                 </a:solidFill>
                 <a:latin typeface="Calibri" pitchFamily="34" charset="0"/>
+                <a:ea typeface="Amiri" pitchFamily="2" charset="-78"/>
                 <a:cs typeface="Amiri" pitchFamily="2" charset="-78"/>
               </a:rPr>
               <a:t>  pl. جِنْسِيَّاتٌ</a:t>
@@ -38975,6 +39071,7 @@
                   <a:srgbClr val="1B3B6F"/>
                 </a:solidFill>
                 <a:latin typeface="Amiri" pitchFamily="2" charset="-78"/>
+                <a:ea typeface="Amiri" pitchFamily="2" charset="-78"/>
                 <a:cs typeface="Amiri" pitchFamily="2" charset="-78"/>
               </a:rPr>
               <a:t>لُغَةٌ رَسْمِيَّةٌ</a:t>
@@ -39021,11 +39118,12 @@
               <a:buNone/>
             </a:pPr>
             <a:r>
-              <a:rPr lang="en-US" sz="1000" i="1" dirty="0">
+              <a:rPr lang="ar-SA" sz="1000" i="1" dirty="0">
                 <a:solidFill>
                   <a:srgbClr val="5A6472"/>
                 </a:solidFill>
                 <a:latin typeface="Calibri" pitchFamily="34" charset="0"/>
+                <a:ea typeface="Amiri" pitchFamily="2" charset="-78"/>
                 <a:cs typeface="Amiri" pitchFamily="2" charset="-78"/>
               </a:rPr>
               <a:t>  pl. لُغَاتٌ رَسْمِيَّةٌ</a:t>
@@ -39064,6 +39162,7 @@
                   <a:srgbClr val="1B3B6F"/>
                 </a:solidFill>
                 <a:latin typeface="Amiri" pitchFamily="2" charset="-78"/>
+                <a:ea typeface="Amiri" pitchFamily="2" charset="-78"/>
                 <a:cs typeface="Amiri" pitchFamily="2" charset="-78"/>
               </a:rPr>
               <a:t>العَرَبِيَّةُ الفُصْحَى</a:t>
@@ -39153,6 +39252,7 @@
                   <a:srgbClr val="1B3B6F"/>
                 </a:solidFill>
                 <a:latin typeface="Amiri" pitchFamily="2" charset="-78"/>
+                <a:ea typeface="Amiri" pitchFamily="2" charset="-78"/>
                 <a:cs typeface="Amiri" pitchFamily="2" charset="-78"/>
               </a:rPr>
               <a:t>اللَّهَجَاتُ</a:t>
@@ -39199,11 +39299,12 @@
               <a:buNone/>
             </a:pPr>
             <a:r>
-              <a:rPr lang="en-US" sz="1000" i="1" dirty="0">
+              <a:rPr lang="ar-SA" sz="1000" i="1" dirty="0">
                 <a:solidFill>
                   <a:srgbClr val="5A6472"/>
                 </a:solidFill>
                 <a:latin typeface="Calibri" pitchFamily="34" charset="0"/>
+                <a:ea typeface="Amiri" pitchFamily="2" charset="-78"/>
                 <a:cs typeface="Amiri" pitchFamily="2" charset="-78"/>
               </a:rPr>
               <a:t>  sing. لَهْجَةٌ</a:t>
@@ -39318,6 +39419,7 @@
                   <a:srgbClr val="1B3B6F"/>
                 </a:solidFill>
                 <a:latin typeface="Amiri" pitchFamily="2" charset="-78"/>
+                <a:ea typeface="Amiri" pitchFamily="2" charset="-78"/>
                 <a:cs typeface="Amiri" pitchFamily="2" charset="-78"/>
               </a:rPr>
               <a:t>عَائِلَتِي مِنْ … وَاللُّغَةُ الرَّسْمِيَّةُ …</a:t>
@@ -39987,6 +40089,7 @@
                   <a:srgbClr val="FFFFFF"/>
                 </a:solidFill>
                 <a:latin typeface="Amiri" pitchFamily="2" charset="-78"/>
+                <a:ea typeface="Amiri" pitchFamily="2" charset="-78"/>
                 <a:cs typeface="Amiri" pitchFamily="2" charset="-78"/>
               </a:rPr>
               <a:t>أَحْسَنْتُمْ! إِلَى اللِّقَاءِ</a:t>
@@ -40139,6 +40242,7 @@
                   <a:srgbClr val="D4AF37"/>
                 </a:solidFill>
                 <a:latin typeface="Amiri" pitchFamily="2" charset="-78"/>
+                <a:ea typeface="Amiri" pitchFamily="2" charset="-78"/>
                 <a:cs typeface="Amiri" pitchFamily="2" charset="-78"/>
               </a:rPr>
               <a:t>الدُّوَلُ وَالجِنْسِيَّاتُ وَاللُّغَاتُ</a:t>
@@ -40272,6 +40376,7 @@
                   <a:srgbClr val="D4AF37"/>
                 </a:solidFill>
                 <a:latin typeface="Amiri" pitchFamily="2" charset="-78"/>
+                <a:ea typeface="Amiri" pitchFamily="2" charset="-78"/>
                 <a:cs typeface="Amiri" pitchFamily="2" charset="-78"/>
               </a:rPr>
               <a:t>م</a:t>
@@ -40592,6 +40697,7 @@
                   <a:srgbClr val="8A6D1E"/>
                 </a:solidFill>
                 <a:latin typeface="Amiri" pitchFamily="2" charset="-78"/>
+                <a:ea typeface="Amiri" pitchFamily="2" charset="-78"/>
                 <a:cs typeface="Amiri" pitchFamily="2" charset="-78"/>
               </a:rPr>
               <a:t>خَرِيطَةُ الدَّرْسِ</a:t>
@@ -40906,6 +41012,7 @@
                   <a:srgbClr val="0E7C86"/>
                 </a:solidFill>
                 <a:latin typeface="Amiri" pitchFamily="2" charset="-78"/>
+                <a:ea typeface="Amiri" pitchFamily="2" charset="-78"/>
                 <a:cs typeface="Amiri" pitchFamily="2" charset="-78"/>
               </a:rPr>
               <a:t>تَهْيِئَةٌ</a:t>
@@ -41182,6 +41289,7 @@
                   <a:srgbClr val="1B3B6F"/>
                 </a:solidFill>
                 <a:latin typeface="Amiri" pitchFamily="2" charset="-78"/>
+                <a:ea typeface="Amiri" pitchFamily="2" charset="-78"/>
                 <a:cs typeface="Amiri" pitchFamily="2" charset="-78"/>
               </a:rPr>
               <a:t>خُطَّةُ التَّقْيِيمِ</a:t>
@@ -41458,6 +41566,7 @@
                   <a:srgbClr val="6B4C9A"/>
                 </a:solidFill>
                 <a:latin typeface="Amiri" pitchFamily="2" charset="-78"/>
+                <a:ea typeface="Amiri" pitchFamily="2" charset="-78"/>
                 <a:cs typeface="Amiri" pitchFamily="2" charset="-78"/>
               </a:rPr>
               <a:t>الاِسْتِمَاعُ</a:t>
@@ -41734,6 +41843,7 @@
                   <a:srgbClr val="2F6FB0"/>
                 </a:solidFill>
                 <a:latin typeface="Amiri" pitchFamily="2" charset="-78"/>
+                <a:ea typeface="Amiri" pitchFamily="2" charset="-78"/>
                 <a:cs typeface="Amiri" pitchFamily="2" charset="-78"/>
               </a:rPr>
               <a:t>القِرَاءَةُ</a:t>
@@ -42010,6 +42120,7 @@
                   <a:srgbClr val="1E6B52"/>
                 </a:solidFill>
                 <a:latin typeface="Amiri" pitchFamily="2" charset="-78"/>
+                <a:ea typeface="Amiri" pitchFamily="2" charset="-78"/>
                 <a:cs typeface="Amiri" pitchFamily="2" charset="-78"/>
               </a:rPr>
               <a:t>الكِتَابَةُ وَالتَّحَدُّثُ</a:t>
@@ -42286,6 +42397,7 @@
                   <a:srgbClr val="8A6D1E"/>
                 </a:solidFill>
                 <a:latin typeface="Amiri" pitchFamily="2" charset="-78"/>
+                <a:ea typeface="Amiri" pitchFamily="2" charset="-78"/>
                 <a:cs typeface="Amiri" pitchFamily="2" charset="-78"/>
               </a:rPr>
               <a:t>الهَدَفُ</a:t>
@@ -42562,6 +42674,7 @@
                   <a:srgbClr val="C45A3C"/>
                 </a:solidFill>
                 <a:latin typeface="Amiri" pitchFamily="2" charset="-78"/>
+                <a:ea typeface="Amiri" pitchFamily="2" charset="-78"/>
                 <a:cs typeface="Amiri" pitchFamily="2" charset="-78"/>
               </a:rPr>
               <a:t>اِسْتَعِدَّ</a:t>
@@ -42805,6 +42918,7 @@
                   <a:srgbClr val="D4AF37"/>
                 </a:solidFill>
                 <a:latin typeface="Amiri" pitchFamily="2" charset="-78"/>
+                <a:ea typeface="Amiri" pitchFamily="2" charset="-78"/>
                 <a:cs typeface="Amiri" pitchFamily="2" charset="-78"/>
               </a:rPr>
               <a:t>م</a:t>
@@ -43125,6 +43239,7 @@
                   <a:srgbClr val="8A6D1E"/>
                 </a:solidFill>
                 <a:latin typeface="Amiri" pitchFamily="2" charset="-78"/>
+                <a:ea typeface="Amiri" pitchFamily="2" charset="-78"/>
                 <a:cs typeface="Amiri" pitchFamily="2" charset="-78"/>
               </a:rPr>
               <a:t>اِبْدَأِ الآنَ</a:t>
@@ -43311,6 +43426,7 @@
                   <a:srgbClr val="1B3B6F"/>
                 </a:solidFill>
                 <a:latin typeface="Amiri" pitchFamily="2" charset="-78"/>
+                <a:ea typeface="Amiri" pitchFamily="2" charset="-78"/>
                 <a:cs typeface="Amiri" pitchFamily="2" charset="-78"/>
               </a:rPr>
               <a:t>تَقْيِيمٌ</a:t>
@@ -43775,6 +43891,7 @@
                   <a:srgbClr val="1B3B6F"/>
                 </a:solidFill>
                 <a:latin typeface="Amiri" pitchFamily="2" charset="-78"/>
+                <a:ea typeface="Amiri" pitchFamily="2" charset="-78"/>
                 <a:cs typeface="Amiri" pitchFamily="2" charset="-78"/>
               </a:rPr>
               <a:t>يَحْتَاجُ المُدَرِّسُ</a:t>
@@ -43801,6 +43918,7 @@
                   <a:srgbClr val="1B3B6F"/>
                 </a:solidFill>
                 <a:latin typeface="Amiri" pitchFamily="2" charset="-78"/>
+                <a:ea typeface="Amiri" pitchFamily="2" charset="-78"/>
                 <a:cs typeface="Amiri" pitchFamily="2" charset="-78"/>
               </a:rPr>
               <a:t>الصَّبْرِ</a:t>
@@ -43915,6 +44033,7 @@
                   <a:srgbClr val="1F2A37"/>
                 </a:solidFill>
                 <a:latin typeface="Amiri" pitchFamily="2" charset="-78"/>
+                <a:ea typeface="Amiri" pitchFamily="2" charset="-78"/>
                 <a:cs typeface="Amiri" pitchFamily="2" charset="-78"/>
               </a:rPr>
               <a:t>إِلَى</a:t>
@@ -44016,6 +44135,7 @@
                   <a:srgbClr val="1F2A37"/>
                 </a:solidFill>
                 <a:latin typeface="Amiri" pitchFamily="2" charset="-78"/>
+                <a:ea typeface="Amiri" pitchFamily="2" charset="-78"/>
                 <a:cs typeface="Amiri" pitchFamily="2" charset="-78"/>
               </a:rPr>
               <a:t>فِي</a:t>
@@ -44117,6 +44237,7 @@
                   <a:srgbClr val="1F2A37"/>
                 </a:solidFill>
                 <a:latin typeface="Amiri" pitchFamily="2" charset="-78"/>
+                <a:ea typeface="Amiri" pitchFamily="2" charset="-78"/>
                 <a:cs typeface="Amiri" pitchFamily="2" charset="-78"/>
               </a:rPr>
               <a:t>مِنْ</a:t>
@@ -44353,6 +44474,7 @@
                   <a:srgbClr val="1F2A37"/>
                 </a:solidFill>
                 <a:latin typeface="Amiri" pitchFamily="2" charset="-78"/>
+                <a:ea typeface="Amiri" pitchFamily="2" charset="-78"/>
                 <a:cs typeface="Amiri" pitchFamily="2" charset="-78"/>
               </a:rPr>
               <a:t>سَوْفَ تَدَرَّبْتُ</a:t>
@@ -44454,6 +44576,7 @@
                   <a:srgbClr val="1F2A37"/>
                 </a:solidFill>
                 <a:latin typeface="Amiri" pitchFamily="2" charset="-78"/>
+                <a:ea typeface="Amiri" pitchFamily="2" charset="-78"/>
                 <a:cs typeface="Amiri" pitchFamily="2" charset="-78"/>
               </a:rPr>
               <a:t>سَتَدَرَّبْتُ</a:t>
@@ -44555,6 +44678,7 @@
                   <a:srgbClr val="1F2A37"/>
                 </a:solidFill>
                 <a:latin typeface="Amiri" pitchFamily="2" charset="-78"/>
+                <a:ea typeface="Amiri" pitchFamily="2" charset="-78"/>
                 <a:cs typeface="Amiri" pitchFamily="2" charset="-78"/>
               </a:rPr>
               <a:t>سَأَتَدَرَّبُ</a:t>
@@ -44703,6 +44827,7 @@
                   <a:srgbClr val="1B3B6F"/>
                 </a:solidFill>
                 <a:latin typeface="Amiri" pitchFamily="2" charset="-78"/>
+                <a:ea typeface="Amiri" pitchFamily="2" charset="-78"/>
                 <a:cs typeface="Amiri" pitchFamily="2" charset="-78"/>
               </a:rPr>
               <a:t>سَأَدْرُسُ بِجِدٍّ</a:t>
@@ -44729,6 +44854,7 @@
                   <a:srgbClr val="1B3B6F"/>
                 </a:solidFill>
                 <a:latin typeface="Amiri" pitchFamily="2" charset="-78"/>
+                <a:ea typeface="Amiri" pitchFamily="2" charset="-78"/>
                 <a:cs typeface="Amiri" pitchFamily="2" charset="-78"/>
               </a:rPr>
               <a:t>أَنْجَحَ</a:t>
@@ -44843,6 +44969,7 @@
                   <a:srgbClr val="1F2A37"/>
                 </a:solidFill>
                 <a:latin typeface="Amiri" pitchFamily="2" charset="-78"/>
+                <a:ea typeface="Amiri" pitchFamily="2" charset="-78"/>
                 <a:cs typeface="Amiri" pitchFamily="2" charset="-78"/>
               </a:rPr>
               <a:t>مَعَ</a:t>
@@ -44944,6 +45071,7 @@
                   <a:srgbClr val="1F2A37"/>
                 </a:solidFill>
                 <a:latin typeface="Amiri" pitchFamily="2" charset="-78"/>
+                <a:ea typeface="Amiri" pitchFamily="2" charset="-78"/>
                 <a:cs typeface="Amiri" pitchFamily="2" charset="-78"/>
               </a:rPr>
               <a:t>بَيْنَمَا</a:t>
@@ -45045,6 +45173,7 @@
                   <a:srgbClr val="1F2A37"/>
                 </a:solidFill>
                 <a:latin typeface="Amiri" pitchFamily="2" charset="-78"/>
+                <a:ea typeface="Amiri" pitchFamily="2" charset="-78"/>
                 <a:cs typeface="Amiri" pitchFamily="2" charset="-78"/>
               </a:rPr>
               <a:t>لِكَيْ</a:t>
@@ -45281,6 +45410,7 @@
                   <a:srgbClr val="1F2A37"/>
                 </a:solidFill>
                 <a:latin typeface="Amiri" pitchFamily="2" charset="-78"/>
+                <a:ea typeface="Amiri" pitchFamily="2" charset="-78"/>
                 <a:cs typeface="Amiri" pitchFamily="2" charset="-78"/>
               </a:rPr>
               <a:t>أُخْتِي مُحَاسِبَةٌ وَسَتَعْمَلُ فِي شَرِكَةٍ.</a:t>
@@ -45382,6 +45512,7 @@
                   <a:srgbClr val="1F2A37"/>
                 </a:solidFill>
                 <a:latin typeface="Amiri" pitchFamily="2" charset="-78"/>
+                <a:ea typeface="Amiri" pitchFamily="2" charset="-78"/>
                 <a:cs typeface="Amiri" pitchFamily="2" charset="-78"/>
               </a:rPr>
               <a:t>أُخْتِي مُحَاسِبٌ وَسَوْفَ عَمِلَتْ.</a:t>
@@ -45483,6 +45614,7 @@
                   <a:srgbClr val="1F2A37"/>
                 </a:solidFill>
                 <a:latin typeface="Amiri" pitchFamily="2" charset="-78"/>
+                <a:ea typeface="Amiri" pitchFamily="2" charset="-78"/>
                 <a:cs typeface="Amiri" pitchFamily="2" charset="-78"/>
               </a:rPr>
               <a:t>أُخْتِي فِي مُحَاسِبَةٍ.</a:t>
@@ -45818,6 +45950,7 @@
                   <a:srgbClr val="D4AF37"/>
                 </a:solidFill>
                 <a:latin typeface="Amiri" pitchFamily="2" charset="-78"/>
+                <a:ea typeface="Amiri" pitchFamily="2" charset="-78"/>
                 <a:cs typeface="Amiri" pitchFamily="2" charset="-78"/>
               </a:rPr>
               <a:t>م</a:t>
@@ -46138,6 +46271,7 @@
                   <a:srgbClr val="8A6D1E"/>
                 </a:solidFill>
                 <a:latin typeface="Amiri" pitchFamily="2" charset="-78"/>
+                <a:ea typeface="Amiri" pitchFamily="2" charset="-78"/>
                 <a:cs typeface="Amiri" pitchFamily="2" charset="-78"/>
               </a:rPr>
               <a:t>الإِجَابَاتُ وَالتَّعْلِيلُ</a:t>
@@ -46324,6 +46458,7 @@
                   <a:srgbClr val="1B3B6F"/>
                 </a:solidFill>
                 <a:latin typeface="Amiri" pitchFamily="2" charset="-78"/>
+                <a:ea typeface="Amiri" pitchFamily="2" charset="-78"/>
                 <a:cs typeface="Amiri" pitchFamily="2" charset="-78"/>
               </a:rPr>
               <a:t>تَقْيِيمٌ</a:t>
@@ -46853,6 +46988,7 @@
                   <a:srgbClr val="1B3B6F"/>
                 </a:solidFill>
                 <a:latin typeface="Amiri" pitchFamily="2" charset="-78"/>
+                <a:ea typeface="Amiri" pitchFamily="2" charset="-78"/>
                 <a:cs typeface="Amiri" pitchFamily="2" charset="-78"/>
               </a:rPr>
               <a:t>يَحْتَاجُ المُدَرِّسُ</a:t>
@@ -46879,6 +47015,7 @@
                   <a:srgbClr val="1B3B6F"/>
                 </a:solidFill>
                 <a:latin typeface="Amiri" pitchFamily="2" charset="-78"/>
+                <a:ea typeface="Amiri" pitchFamily="2" charset="-78"/>
                 <a:cs typeface="Amiri" pitchFamily="2" charset="-78"/>
               </a:rPr>
               <a:t>الصَّبْرِ</a:t>
@@ -47020,6 +47157,7 @@
                   <a:srgbClr val="1F2A37"/>
                 </a:solidFill>
                 <a:latin typeface="Amiri" pitchFamily="2" charset="-78"/>
+                <a:ea typeface="Amiri" pitchFamily="2" charset="-78"/>
                 <a:cs typeface="Amiri" pitchFamily="2" charset="-78"/>
               </a:rPr>
               <a:t>إِلَى</a:t>
@@ -47121,6 +47259,7 @@
                   <a:srgbClr val="9AA1AB"/>
                 </a:solidFill>
                 <a:latin typeface="Amiri" pitchFamily="2" charset="-78"/>
+                <a:ea typeface="Amiri" pitchFamily="2" charset="-78"/>
                 <a:cs typeface="Amiri" pitchFamily="2" charset="-78"/>
               </a:rPr>
               <a:t>فِي</a:t>
@@ -47222,6 +47361,7 @@
                   <a:srgbClr val="9AA1AB"/>
                 </a:solidFill>
                 <a:latin typeface="Amiri" pitchFamily="2" charset="-78"/>
+                <a:ea typeface="Amiri" pitchFamily="2" charset="-78"/>
                 <a:cs typeface="Amiri" pitchFamily="2" charset="-78"/>
               </a:rPr>
               <a:t>مِنْ</a:t>
@@ -47496,6 +47636,7 @@
                   <a:srgbClr val="9AA1AB"/>
                 </a:solidFill>
                 <a:latin typeface="Amiri" pitchFamily="2" charset="-78"/>
+                <a:ea typeface="Amiri" pitchFamily="2" charset="-78"/>
                 <a:cs typeface="Amiri" pitchFamily="2" charset="-78"/>
               </a:rPr>
               <a:t>سَوْفَ تَدَرَّبْتُ</a:t>
@@ -47597,6 +47738,7 @@
                   <a:srgbClr val="9AA1AB"/>
                 </a:solidFill>
                 <a:latin typeface="Amiri" pitchFamily="2" charset="-78"/>
+                <a:ea typeface="Amiri" pitchFamily="2" charset="-78"/>
                 <a:cs typeface="Amiri" pitchFamily="2" charset="-78"/>
               </a:rPr>
               <a:t>سَتَدَرَّبْتُ</a:t>
@@ -47725,6 +47867,7 @@
                   <a:srgbClr val="1F2A37"/>
                 </a:solidFill>
                 <a:latin typeface="Amiri" pitchFamily="2" charset="-78"/>
+                <a:ea typeface="Amiri" pitchFamily="2" charset="-78"/>
                 <a:cs typeface="Amiri" pitchFamily="2" charset="-78"/>
               </a:rPr>
               <a:t>سَأَتَدَرَّبُ</a:t>
@@ -47911,6 +48054,7 @@
                   <a:srgbClr val="1B3B6F"/>
                 </a:solidFill>
                 <a:latin typeface="Amiri" pitchFamily="2" charset="-78"/>
+                <a:ea typeface="Amiri" pitchFamily="2" charset="-78"/>
                 <a:cs typeface="Amiri" pitchFamily="2" charset="-78"/>
               </a:rPr>
               <a:t>سَأَدْرُسُ بِجِدٍّ</a:t>
@@ -47937,6 +48081,7 @@
                   <a:srgbClr val="1B3B6F"/>
                 </a:solidFill>
                 <a:latin typeface="Amiri" pitchFamily="2" charset="-78"/>
+                <a:ea typeface="Amiri" pitchFamily="2" charset="-78"/>
                 <a:cs typeface="Amiri" pitchFamily="2" charset="-78"/>
               </a:rPr>
               <a:t>أَنْجَحَ</a:t>
@@ -48051,6 +48196,7 @@
                   <a:srgbClr val="9AA1AB"/>
                 </a:solidFill>
                 <a:latin typeface="Amiri" pitchFamily="2" charset="-78"/>
+                <a:ea typeface="Amiri" pitchFamily="2" charset="-78"/>
                 <a:cs typeface="Amiri" pitchFamily="2" charset="-78"/>
               </a:rPr>
               <a:t>مَعَ</a:t>
@@ -48152,6 +48298,7 @@
                   <a:srgbClr val="9AA1AB"/>
                 </a:solidFill>
                 <a:latin typeface="Amiri" pitchFamily="2" charset="-78"/>
+                <a:ea typeface="Amiri" pitchFamily="2" charset="-78"/>
                 <a:cs typeface="Amiri" pitchFamily="2" charset="-78"/>
               </a:rPr>
               <a:t>بَيْنَمَا</a:t>
@@ -48280,6 +48427,7 @@
                   <a:srgbClr val="1F2A37"/>
                 </a:solidFill>
                 <a:latin typeface="Amiri" pitchFamily="2" charset="-78"/>
+                <a:ea typeface="Amiri" pitchFamily="2" charset="-78"/>
                 <a:cs typeface="Amiri" pitchFamily="2" charset="-78"/>
               </a:rPr>
               <a:t>لِكَيْ</a:t>
@@ -48581,6 +48729,7 @@
                   <a:srgbClr val="1F2A37"/>
                 </a:solidFill>
                 <a:latin typeface="Amiri" pitchFamily="2" charset="-78"/>
+                <a:ea typeface="Amiri" pitchFamily="2" charset="-78"/>
                 <a:cs typeface="Amiri" pitchFamily="2" charset="-78"/>
               </a:rPr>
               <a:t>أُخْتِي مُحَاسِبَةٌ وَسَتَعْمَلُ فِي شَرِكَةٍ.</a:t>
@@ -48682,6 +48831,7 @@
                   <a:srgbClr val="9AA1AB"/>
                 </a:solidFill>
                 <a:latin typeface="Amiri" pitchFamily="2" charset="-78"/>
+                <a:ea typeface="Amiri" pitchFamily="2" charset="-78"/>
                 <a:cs typeface="Amiri" pitchFamily="2" charset="-78"/>
               </a:rPr>
               <a:t>أُخْتِي مُحَاسِبٌ وَسَوْفَ عَمِلَتْ.</a:t>
@@ -48783,6 +48933,7 @@
                   <a:srgbClr val="9AA1AB"/>
                 </a:solidFill>
                 <a:latin typeface="Amiri" pitchFamily="2" charset="-78"/>
+                <a:ea typeface="Amiri" pitchFamily="2" charset="-78"/>
                 <a:cs typeface="Amiri" pitchFamily="2" charset="-78"/>
               </a:rPr>
               <a:t>أُخْتِي فِي مُحَاسِبَةٍ.</a:t>
@@ -48972,6 +49123,7 @@
                   <a:srgbClr val="1B3B6F"/>
                 </a:solidFill>
                 <a:latin typeface="Amiri" pitchFamily="2" charset="-78"/>
+                <a:ea typeface="Amiri" pitchFamily="2" charset="-78"/>
                 <a:cs typeface="Amiri" pitchFamily="2" charset="-78"/>
               </a:rPr>
               <a:t>المُطَابَقَةُ · حَرْفُ الجَرِّ · المُسْتَقْبَلُ · الدَّلِيلُ</a:t>
@@ -49105,6 +49257,7 @@
                   <a:srgbClr val="D4AF37"/>
                 </a:solidFill>
                 <a:latin typeface="Amiri" pitchFamily="2" charset="-78"/>
+                <a:ea typeface="Amiri" pitchFamily="2" charset="-78"/>
                 <a:cs typeface="Amiri" pitchFamily="2" charset="-78"/>
               </a:rPr>
               <a:t>م</a:t>
@@ -49490,6 +49643,7 @@
                   <a:srgbClr val="8A6D1E"/>
                 </a:solidFill>
                 <a:latin typeface="Amiri" pitchFamily="2" charset="-78"/>
+                <a:ea typeface="Amiri" pitchFamily="2" charset="-78"/>
                 <a:cs typeface="Amiri" pitchFamily="2" charset="-78"/>
               </a:rPr>
               <a:t>تَحَدِّي التَّطْبِيقِ</a:t>
@@ -50666,6 +50820,7 @@
                   <a:srgbClr val="1B3B6F"/>
                 </a:solidFill>
                 <a:latin typeface="Amiri" pitchFamily="2" charset="-78"/>
+                <a:ea typeface="Amiri" pitchFamily="2" charset="-78"/>
                 <a:cs typeface="Amiri" pitchFamily="2" charset="-78"/>
               </a:rPr>
               <a:t>المَرْحَلَةُ الثَّانَوِيَّةُ …</a:t>
@@ -50742,6 +50897,7 @@
                   <a:srgbClr val="1B3B6F"/>
                 </a:solidFill>
                 <a:latin typeface="Amiri" pitchFamily="2" charset="-78"/>
+                <a:ea typeface="Amiri" pitchFamily="2" charset="-78"/>
                 <a:cs typeface="Amiri" pitchFamily="2" charset="-78"/>
               </a:rPr>
               <a:t>يَنْبَغِي أَنْ أُرَاجِعَ …</a:t>
@@ -50818,6 +50974,7 @@
                   <a:srgbClr val="1B3B6F"/>
                 </a:solidFill>
                 <a:latin typeface="Amiri" pitchFamily="2" charset="-78"/>
+                <a:ea typeface="Amiri" pitchFamily="2" charset="-78"/>
                 <a:cs typeface="Amiri" pitchFamily="2" charset="-78"/>
               </a:rPr>
               <a:t>يَعْمَلُ / تَعْمَلُ فِي …</a:t>
@@ -50894,6 +51051,7 @@
                   <a:srgbClr val="1B3B6F"/>
                 </a:solidFill>
                 <a:latin typeface="Amiri" pitchFamily="2" charset="-78"/>
+                <a:ea typeface="Amiri" pitchFamily="2" charset="-78"/>
                 <a:cs typeface="Amiri" pitchFamily="2" charset="-78"/>
               </a:rPr>
               <a:t>أَطْمَحُ إِلَى … لِأَنَّ …</a:t>
@@ -51065,6 +51223,7 @@
                   <a:srgbClr val="D4AF37"/>
                 </a:solidFill>
                 <a:latin typeface="Amiri" pitchFamily="2" charset="-78"/>
+                <a:ea typeface="Amiri" pitchFamily="2" charset="-78"/>
                 <a:cs typeface="Amiri" pitchFamily="2" charset="-78"/>
               </a:rPr>
               <a:t>م</a:t>
@@ -51450,6 +51609,7 @@
                   <a:srgbClr val="8A6D1E"/>
                 </a:solidFill>
                 <a:latin typeface="Amiri" pitchFamily="2" charset="-78"/>
+                <a:ea typeface="Amiri" pitchFamily="2" charset="-78"/>
                 <a:cs typeface="Amiri" pitchFamily="2" charset="-78"/>
               </a:rPr>
               <a:t>تَحَدِّي الْمِحْوَرِ د</a:t>
@@ -52364,6 +52524,7 @@
                   <a:srgbClr val="1B3B6F"/>
                 </a:solidFill>
                 <a:latin typeface="Amiri" pitchFamily="2" charset="-78"/>
+                <a:ea typeface="Amiri" pitchFamily="2" charset="-78"/>
                 <a:cs typeface="Amiri" pitchFamily="2" charset="-78"/>
               </a:rPr>
               <a:t>اَلْعَمَلُ يَحْتَاجُ إِلَى مَهَارَاتٍ تِقْنِيَّةٍ وَالْعَمَلِ ضِمْنَ فَرِيقٍ.</a:t>
@@ -52492,6 +52653,7 @@
                   <a:srgbClr val="1B3B6F"/>
                 </a:solidFill>
                 <a:latin typeface="Amiri" pitchFamily="2" charset="-78"/>
+                <a:ea typeface="Amiri" pitchFamily="2" charset="-78"/>
                 <a:cs typeface="Amiri" pitchFamily="2" charset="-78"/>
               </a:rPr>
               <a:t>بَعْدَ إِرْسَالِ الطَّلَبِ ذَهَبْتُ إِلَى مُقَابَلَةٍ وَحَصَلْتُ عَلَى الْوَظِيفَةِ.</a:t>
@@ -52620,6 +52782,7 @@
                   <a:srgbClr val="1B3B6F"/>
                 </a:solidFill>
                 <a:latin typeface="Amiri" pitchFamily="2" charset="-78"/>
+                <a:ea typeface="Amiri" pitchFamily="2" charset="-78"/>
                 <a:cs typeface="Amiri" pitchFamily="2" charset="-78"/>
               </a:rPr>
               <a:t>أَدْرُسُ بِجِدٍّ لِأَحْصُلَ عَلَى مُؤَهِّلٍ جَيِّدٍ.</a:t>
@@ -52829,6 +52992,7 @@
                   <a:srgbClr val="D4AF37"/>
                 </a:solidFill>
                 <a:latin typeface="Amiri" pitchFamily="2" charset="-78"/>
+                <a:ea typeface="Amiri" pitchFamily="2" charset="-78"/>
                 <a:cs typeface="Amiri" pitchFamily="2" charset="-78"/>
               </a:rPr>
               <a:t>م</a:t>
@@ -53214,6 +53378,7 @@
                   <a:srgbClr val="8A6D1E"/>
                 </a:solidFill>
                 <a:latin typeface="Amiri" pitchFamily="2" charset="-78"/>
+                <a:ea typeface="Amiri" pitchFamily="2" charset="-78"/>
                 <a:cs typeface="Amiri" pitchFamily="2" charset="-78"/>
               </a:rPr>
               <a:t>تَحَدِّي الْمِحْوَرِ د</a:t>
@@ -53620,6 +53785,7 @@
                   <a:srgbClr val="1B3B6F"/>
                 </a:solidFill>
                 <a:latin typeface="Amiri" pitchFamily="2" charset="-78"/>
+                <a:ea typeface="Amiri" pitchFamily="2" charset="-78"/>
                 <a:cs typeface="Amiri" pitchFamily="2" charset="-78"/>
               </a:rPr>
               <a:t>أَدْرُسُ بِجِدٍّ لِأَحْصُلَ عَلَى مُؤَهِّلٍ جَيِّدٍ.</a:t>
@@ -54029,6 +54195,7 @@
                   <a:srgbClr val="1B3B6F"/>
                 </a:solidFill>
                 <a:latin typeface="Amiri" pitchFamily="2" charset="-78"/>
+                <a:ea typeface="Amiri" pitchFamily="2" charset="-78"/>
                 <a:cs typeface="Amiri" pitchFamily="2" charset="-78"/>
               </a:rPr>
               <a:t>اَلْعَمَلُ يَحْتَاجُ إِلَى مَهَارَاتٍ تِقْنِيَّةٍ وَالْعَمَلِ ضِمْنَ فَرِيقٍ.</a:t>
@@ -54487,6 +54654,7 @@
                   <a:srgbClr val="1B3B6F"/>
                 </a:solidFill>
                 <a:latin typeface="Amiri" pitchFamily="2" charset="-78"/>
+                <a:ea typeface="Amiri" pitchFamily="2" charset="-78"/>
                 <a:cs typeface="Amiri" pitchFamily="2" charset="-78"/>
               </a:rPr>
               <a:t>بَعْدَ إِرْسَالِ الطَّلَبِ ذَهَبْتُ إِلَى مُقَابَلَةٍ وَحَصَلْتُ عَلَى الْوَظِيفَةِ.</a:t>
@@ -54658,6 +54826,7 @@
                   <a:srgbClr val="D4AF37"/>
                 </a:solidFill>
                 <a:latin typeface="Amiri" pitchFamily="2" charset="-78"/>
+                <a:ea typeface="Amiri" pitchFamily="2" charset="-78"/>
                 <a:cs typeface="Amiri" pitchFamily="2" charset="-78"/>
               </a:rPr>
               <a:t>م</a:t>
@@ -54978,6 +55147,7 @@
                   <a:srgbClr val="8A6D1E"/>
                 </a:solidFill>
                 <a:latin typeface="Amiri" pitchFamily="2" charset="-78"/>
+                <a:ea typeface="Amiri" pitchFamily="2" charset="-78"/>
                 <a:cs typeface="Amiri" pitchFamily="2" charset="-78"/>
               </a:rPr>
               <a:t>مُرَاجَعَةُ القَوَاعِدِ</a:t>
@@ -55153,6 +55323,7 @@
                   <a:srgbClr val="8A6D1E"/>
                 </a:solidFill>
                 <a:latin typeface="Amiri" pitchFamily="2" charset="-78"/>
+                <a:ea typeface="Amiri" pitchFamily="2" charset="-78"/>
                 <a:cs typeface="Amiri" pitchFamily="2" charset="-78"/>
               </a:rPr>
               <a:t>مُهَنْدِسَةٌ · تَعْمَلُ</a:t>
@@ -55194,6 +55365,7 @@
                   <a:srgbClr val="1B3B6F"/>
                 </a:solidFill>
                 <a:latin typeface="Amiri" pitchFamily="2" charset="-78"/>
+                <a:ea typeface="Amiri" pitchFamily="2" charset="-78"/>
                 <a:cs typeface="Amiri" pitchFamily="2" charset="-78"/>
               </a:rPr>
               <a:t>أُخْتِي مُحَاسِبَةٌ وَسَتَعْمَلُ فِي شَرِكَةٍ.</a:t>
@@ -55434,6 +55606,7 @@
                   <a:srgbClr val="8A6D1E"/>
                 </a:solidFill>
                 <a:latin typeface="Amiri" pitchFamily="2" charset="-78"/>
+                <a:ea typeface="Amiri" pitchFamily="2" charset="-78"/>
                 <a:cs typeface="Amiri" pitchFamily="2" charset="-78"/>
               </a:rPr>
               <a:t>إِلَى · لِـ · الَّتِي</a:t>
@@ -55472,6 +55645,7 @@
                   <a:srgbClr val="1B3B6F"/>
                 </a:solidFill>
                 <a:latin typeface="Amiri" pitchFamily="2" charset="-78"/>
+                <a:ea typeface="Amiri" pitchFamily="2" charset="-78"/>
                 <a:cs typeface="Amiri" pitchFamily="2" charset="-78"/>
               </a:rPr>
               <a:t>الشَّرِكَةُ الَّتِي تُقَدِّمُ تَدْرِيبًا</a:t>
@@ -55712,6 +55886,7 @@
                   <a:srgbClr val="8A6D1E"/>
                 </a:solidFill>
                 <a:latin typeface="Amiri" pitchFamily="2" charset="-78"/>
+                <a:ea typeface="Amiri" pitchFamily="2" charset="-78"/>
                 <a:cs typeface="Amiri" pitchFamily="2" charset="-78"/>
               </a:rPr>
               <a:t>سَـ · لِكَيْ · الدَّلِيلُ</a:t>
@@ -55753,6 +55928,7 @@
                   <a:srgbClr val="1B3B6F"/>
                 </a:solidFill>
                 <a:latin typeface="Amiri" pitchFamily="2" charset="-78"/>
+                <a:ea typeface="Amiri" pitchFamily="2" charset="-78"/>
                 <a:cs typeface="Amiri" pitchFamily="2" charset="-78"/>
               </a:rPr>
               <a:t>أَنَا مُنَظَّمٌ، وَالدَّلِيلُ أَنَّنِي أَحْتَرِمُ المَوَاعِيدَ.</a:t>
@@ -56007,6 +56183,7 @@
                   <a:srgbClr val="1B3B6F"/>
                 </a:solidFill>
                 <a:latin typeface="Amiri" pitchFamily="2" charset="-78"/>
+                <a:ea typeface="Amiri" pitchFamily="2" charset="-78"/>
                 <a:cs typeface="Amiri" pitchFamily="2" charset="-78"/>
               </a:rPr>
               <a:t>إِذَا نَجَحْتُ فَسَأَدْرُسُ فِي الجَامِعَةِ.</a:t>
@@ -56086,6 +56263,7 @@
                   <a:srgbClr val="B83227"/>
                 </a:solidFill>
                 <a:latin typeface="Amiri" pitchFamily="2" charset="-78"/>
+                <a:ea typeface="Amiri" pitchFamily="2" charset="-78"/>
                 <a:cs typeface="Amiri" pitchFamily="2" charset="-78"/>
               </a:rPr>
               <a:t>إِذَا أَنْجَحُ سَوْفَ دَرَسْتُ.</a:t>
@@ -56207,13 +56385,9 @@
     <a:fontScheme name="Office">
       <a:majorFont>
         <a:latin typeface="Calibri Light" panose="020F0302020204030204"/>
-        <a:ea typeface=""/>
-        <a:cs typeface=""/>
-        <a:font script="Jpan" typeface="游ゴシック Light"/>
-        <a:font script="Hang" typeface="맑은 고딕"/>
-        <a:font script="Hans" typeface="等线 Light"/>
-        <a:font script="Hant" typeface="新細明體"/>
-        <a:font script="Arab" typeface="Times New Roman"/>
+        <a:ea typeface="Amiri" pitchFamily="2" charset="-78"/>
+        <a:cs typeface="Amiri" pitchFamily="2" charset="-78"/>
+        <a:font script="Arab" typeface="Amiri"/>
         <a:font script="Hebr" typeface="Times New Roman"/>
         <a:font script="Thai" typeface="Angsana New"/>
         <a:font script="Ethi" typeface="Nyala"/>
@@ -56259,13 +56433,9 @@
       </a:majorFont>
       <a:minorFont>
         <a:latin typeface="Calibri" panose="020F0502020204030204"/>
-        <a:ea typeface=""/>
-        <a:cs typeface=""/>
-        <a:font script="Jpan" typeface="游ゴシック"/>
-        <a:font script="Hang" typeface="맑은 고딕"/>
-        <a:font script="Hans" typeface="等线"/>
-        <a:font script="Hant" typeface="新細明體"/>
-        <a:font script="Arab" typeface="Arial"/>
+        <a:ea typeface="Amiri" pitchFamily="2" charset="-78"/>
+        <a:cs typeface="Amiri" pitchFamily="2" charset="-78"/>
+        <a:font script="Arab" typeface="Amiri"/>
         <a:font script="Hebr" typeface="Arial"/>
         <a:font script="Thai" typeface="Cordia New"/>
         <a:font script="Ethi" typeface="Nyala"/>
